--- a/example/integration-test.pptx
+++ b/example/integration-test.pptx
@@ -5811,135 +5811,7 @@
       </p:grpSpPr>
       <p:sp>
         <p:nvSpPr>
-          <p:cNvPr id="2" name="Shape 0"/>
-          <p:cNvSpPr/>
-          <p:nvPr/>
-        </p:nvSpPr>
-        <p:spPr>
-          <a:xfrm>
-            <a:off x="502920" y="155448"/>
-            <a:ext cx="2880360" cy="338328"/>
-          </a:xfrm>
-          <a:prstGeom prst="rect">
-            <a:avLst/>
-          </a:prstGeom>
-          <a:solidFill>
-            <a:srgbClr val="FFFFFF"/>
-          </a:solidFill>
-          <a:ln w="12700">
-            <a:solidFill>
-              <a:srgbClr val="000000"/>
-            </a:solidFill>
-            <a:prstDash val="solid"/>
-          </a:ln>
-        </p:spPr>
-      </p:sp>
-      <p:sp>
-        <p:nvSpPr>
-          <p:cNvPr id="3" name="Text 1"/>
-          <p:cNvSpPr/>
-          <p:nvPr/>
-        </p:nvSpPr>
-        <p:spPr>
-          <a:xfrm>
-            <a:off x="548640" y="155448"/>
-            <a:ext cx="2788920" cy="338328"/>
-          </a:xfrm>
-          <a:prstGeom prst="rect">
-            <a:avLst/>
-          </a:prstGeom>
-          <a:noFill/>
-          <a:ln/>
-        </p:spPr>
-        <p:txBody>
-          <a:bodyPr wrap="square" rtlCol="0" anchor="ctr"/>
-          <a:lstStyle/>
-          <a:p>
-            <a:pPr algn="ctr" indent="0" marL="0">
-              <a:buNone/>
-            </a:pPr>
-            <a:r>
-              <a:rPr lang="en-US" sz="1600" dirty="0">
-                <a:solidFill>
-                  <a:srgbClr val="000000"/>
-                </a:solidFill>
-                <a:latin typeface="微软雅黑" pitchFamily="34" charset="0"/>
-                <a:ea typeface="微软雅黑" pitchFamily="34" charset="-122"/>
-                <a:cs typeface="微软雅黑" pitchFamily="34" charset="-120"/>
-              </a:rPr>
-              <a:t>技术文档</a:t>
-            </a:r>
-            <a:endParaRPr lang="en-US" sz="1600" dirty="0"/>
-          </a:p>
-        </p:txBody>
-      </p:sp>
-      <p:sp>
-        <p:nvSpPr>
-          <p:cNvPr id="4" name="Shape 2"/>
-          <p:cNvSpPr/>
-          <p:nvPr/>
-        </p:nvSpPr>
-        <p:spPr>
-          <a:xfrm>
-            <a:off x="5751576" y="155448"/>
-            <a:ext cx="612648" cy="338328"/>
-          </a:xfrm>
-          <a:prstGeom prst="rect">
-            <a:avLst/>
-          </a:prstGeom>
-          <a:solidFill>
-            <a:srgbClr val="FFFFFF"/>
-          </a:solidFill>
-          <a:ln w="12700">
-            <a:solidFill>
-              <a:srgbClr val="000000"/>
-            </a:solidFill>
-            <a:prstDash val="solid"/>
-          </a:ln>
-        </p:spPr>
-      </p:sp>
-      <p:sp>
-        <p:nvSpPr>
-          <p:cNvPr id="5" name="Text 3"/>
-          <p:cNvSpPr/>
-          <p:nvPr/>
-        </p:nvSpPr>
-        <p:spPr>
-          <a:xfrm>
-            <a:off x="5751576" y="155448"/>
-            <a:ext cx="612648" cy="338328"/>
-          </a:xfrm>
-          <a:prstGeom prst="rect">
-            <a:avLst/>
-          </a:prstGeom>
-          <a:noFill/>
-          <a:ln/>
-        </p:spPr>
-        <p:txBody>
-          <a:bodyPr wrap="square" rtlCol="0" anchor="ctr"/>
-          <a:lstStyle/>
-          <a:p>
-            <a:pPr algn="ctr" indent="0" marL="0">
-              <a:buNone/>
-            </a:pPr>
-            <a:r>
-              <a:rPr lang="en-US" sz="1200" dirty="0">
-                <a:solidFill>
-                  <a:srgbClr val="000000"/>
-                </a:solidFill>
-                <a:latin typeface="微软雅黑" pitchFamily="34" charset="0"/>
-                <a:ea typeface="微软雅黑" pitchFamily="34" charset="-122"/>
-                <a:cs typeface="微软雅黑" pitchFamily="34" charset="-120"/>
-              </a:rPr>
-              <a:t>1</a:t>
-            </a:r>
-            <a:endParaRPr lang="en-US" sz="1200" dirty="0"/>
-          </a:p>
-        </p:txBody>
-      </p:sp>
-      <p:sp>
-        <p:nvSpPr>
-          <p:cNvPr id="6" name="Text 4"/>
+          <p:cNvPr id="2" name="Text 0"/>
           <p:cNvSpPr/>
           <p:nvPr/>
         </p:nvSpPr>
